--- a/assumptions_schematic/assumptions_schematic.pptx
+++ b/assumptions_schematic/assumptions_schematic.pptx
@@ -259,7 +259,7 @@
           <a:p>
             <a:fld id="{2225F40E-4D6A-4DF5-98D1-C5D2D280A6AC}" type="datetimeFigureOut">
               <a:rPr lang="en-US" smtClean="0"/>
-              <a:t>5/25/2025</a:t>
+              <a:t>8/23/2025</a:t>
             </a:fld>
             <a:endParaRPr lang="en-US"/>
           </a:p>
@@ -457,7 +457,7 @@
           <a:p>
             <a:fld id="{2225F40E-4D6A-4DF5-98D1-C5D2D280A6AC}" type="datetimeFigureOut">
               <a:rPr lang="en-US" smtClean="0"/>
-              <a:t>5/25/2025</a:t>
+              <a:t>8/23/2025</a:t>
             </a:fld>
             <a:endParaRPr lang="en-US"/>
           </a:p>
@@ -665,7 +665,7 @@
           <a:p>
             <a:fld id="{2225F40E-4D6A-4DF5-98D1-C5D2D280A6AC}" type="datetimeFigureOut">
               <a:rPr lang="en-US" smtClean="0"/>
-              <a:t>5/25/2025</a:t>
+              <a:t>8/23/2025</a:t>
             </a:fld>
             <a:endParaRPr lang="en-US"/>
           </a:p>
@@ -863,7 +863,7 @@
           <a:p>
             <a:fld id="{2225F40E-4D6A-4DF5-98D1-C5D2D280A6AC}" type="datetimeFigureOut">
               <a:rPr lang="en-US" smtClean="0"/>
-              <a:t>5/25/2025</a:t>
+              <a:t>8/23/2025</a:t>
             </a:fld>
             <a:endParaRPr lang="en-US"/>
           </a:p>
@@ -1138,7 +1138,7 @@
           <a:p>
             <a:fld id="{2225F40E-4D6A-4DF5-98D1-C5D2D280A6AC}" type="datetimeFigureOut">
               <a:rPr lang="en-US" smtClean="0"/>
-              <a:t>5/25/2025</a:t>
+              <a:t>8/23/2025</a:t>
             </a:fld>
             <a:endParaRPr lang="en-US"/>
           </a:p>
@@ -1403,7 +1403,7 @@
           <a:p>
             <a:fld id="{2225F40E-4D6A-4DF5-98D1-C5D2D280A6AC}" type="datetimeFigureOut">
               <a:rPr lang="en-US" smtClean="0"/>
-              <a:t>5/25/2025</a:t>
+              <a:t>8/23/2025</a:t>
             </a:fld>
             <a:endParaRPr lang="en-US"/>
           </a:p>
@@ -1815,7 +1815,7 @@
           <a:p>
             <a:fld id="{2225F40E-4D6A-4DF5-98D1-C5D2D280A6AC}" type="datetimeFigureOut">
               <a:rPr lang="en-US" smtClean="0"/>
-              <a:t>5/25/2025</a:t>
+              <a:t>8/23/2025</a:t>
             </a:fld>
             <a:endParaRPr lang="en-US"/>
           </a:p>
@@ -1956,7 +1956,7 @@
           <a:p>
             <a:fld id="{2225F40E-4D6A-4DF5-98D1-C5D2D280A6AC}" type="datetimeFigureOut">
               <a:rPr lang="en-US" smtClean="0"/>
-              <a:t>5/25/2025</a:t>
+              <a:t>8/23/2025</a:t>
             </a:fld>
             <a:endParaRPr lang="en-US"/>
           </a:p>
@@ -2069,7 +2069,7 @@
           <a:p>
             <a:fld id="{2225F40E-4D6A-4DF5-98D1-C5D2D280A6AC}" type="datetimeFigureOut">
               <a:rPr lang="en-US" smtClean="0"/>
-              <a:t>5/25/2025</a:t>
+              <a:t>8/23/2025</a:t>
             </a:fld>
             <a:endParaRPr lang="en-US"/>
           </a:p>
@@ -2380,7 +2380,7 @@
           <a:p>
             <a:fld id="{2225F40E-4D6A-4DF5-98D1-C5D2D280A6AC}" type="datetimeFigureOut">
               <a:rPr lang="en-US" smtClean="0"/>
-              <a:t>5/25/2025</a:t>
+              <a:t>8/23/2025</a:t>
             </a:fld>
             <a:endParaRPr lang="en-US"/>
           </a:p>
@@ -2668,7 +2668,7 @@
           <a:p>
             <a:fld id="{2225F40E-4D6A-4DF5-98D1-C5D2D280A6AC}" type="datetimeFigureOut">
               <a:rPr lang="en-US" smtClean="0"/>
-              <a:t>5/25/2025</a:t>
+              <a:t>8/23/2025</a:t>
             </a:fld>
             <a:endParaRPr lang="en-US"/>
           </a:p>
@@ -2909,7 +2909,7 @@
           <a:p>
             <a:fld id="{2225F40E-4D6A-4DF5-98D1-C5D2D280A6AC}" type="datetimeFigureOut">
               <a:rPr lang="en-US" smtClean="0"/>
-              <a:t>5/25/2025</a:t>
+              <a:t>8/23/2025</a:t>
             </a:fld>
             <a:endParaRPr lang="en-US"/>
           </a:p>
@@ -3340,7 +3340,7 @@
         </p:nvGrpSpPr>
         <p:grpSpPr>
           <a:xfrm>
-            <a:off x="1163782" y="794327"/>
+            <a:off x="1435309" y="1272309"/>
             <a:ext cx="9321381" cy="3906982"/>
             <a:chOff x="1163782" y="794327"/>
             <a:chExt cx="9321381" cy="3906982"/>
@@ -4403,8 +4403,8 @@
           </p:nvSpPr>
           <p:spPr>
             <a:xfrm>
-              <a:off x="2080748" y="3861221"/>
-              <a:ext cx="1673982" cy="690061"/>
+              <a:off x="1866983" y="3946403"/>
+              <a:ext cx="2056654" cy="690061"/>
             </a:xfrm>
             <a:prstGeom prst="roundRect">
               <a:avLst/>
@@ -4442,7 +4442,7 @@
             <a:p>
               <a:pPr algn="ctr"/>
               <a:r>
-                <a:rPr lang="en-US" sz="1400" dirty="0">
+                <a:rPr lang="en-US" dirty="0">
                   <a:solidFill>
                     <a:schemeClr val="tx1"/>
                   </a:solidFill>
@@ -4826,8 +4826,8 @@
             </a:fontRef>
           </p:style>
         </p:cxnSp>
-        <mc:AlternateContent xmlns:mc="http://schemas.openxmlformats.org/markup-compatibility/2006">
-          <mc:Choice xmlns:a14="http://schemas.microsoft.com/office/drawing/2010/main" Requires="a14">
+        <mc:AlternateContent xmlns:mc="http://schemas.openxmlformats.org/markup-compatibility/2006" xmlns:a14="http://schemas.microsoft.com/office/drawing/2010/main">
+          <mc:Choice Requires="a14">
             <p:sp>
               <p:nvSpPr>
                 <p:cNvPr id="34" name="TextBox 33">
@@ -4878,7 +4878,7 @@
               </p:txBody>
             </p:sp>
           </mc:Choice>
-          <mc:Fallback>
+          <mc:Fallback xmlns="">
             <p:sp>
               <p:nvSpPr>
                 <p:cNvPr id="34" name="TextBox 33">
@@ -4923,8 +4923,8 @@
             </p:sp>
           </mc:Fallback>
         </mc:AlternateContent>
-        <mc:AlternateContent xmlns:mc="http://schemas.openxmlformats.org/markup-compatibility/2006">
-          <mc:Choice xmlns:a14="http://schemas.microsoft.com/office/drawing/2010/main" Requires="a14">
+        <mc:AlternateContent xmlns:mc="http://schemas.openxmlformats.org/markup-compatibility/2006" xmlns:a14="http://schemas.microsoft.com/office/drawing/2010/main">
+          <mc:Choice Requires="a14">
             <p:sp>
               <p:nvSpPr>
                 <p:cNvPr id="35" name="TextBox 34">
@@ -4975,7 +4975,7 @@
               </p:txBody>
             </p:sp>
           </mc:Choice>
-          <mc:Fallback>
+          <mc:Fallback xmlns="">
             <p:sp>
               <p:nvSpPr>
                 <p:cNvPr id="35" name="TextBox 34">
@@ -5020,8 +5020,8 @@
             </p:sp>
           </mc:Fallback>
         </mc:AlternateContent>
-        <mc:AlternateContent xmlns:mc="http://schemas.openxmlformats.org/markup-compatibility/2006">
-          <mc:Choice xmlns:a14="http://schemas.microsoft.com/office/drawing/2010/main" Requires="a14">
+        <mc:AlternateContent xmlns:mc="http://schemas.openxmlformats.org/markup-compatibility/2006" xmlns:a14="http://schemas.microsoft.com/office/drawing/2010/main">
+          <mc:Choice Requires="a14">
             <p:sp>
               <p:nvSpPr>
                 <p:cNvPr id="36" name="TextBox 35">
@@ -5072,7 +5072,7 @@
               </p:txBody>
             </p:sp>
           </mc:Choice>
-          <mc:Fallback>
+          <mc:Fallback xmlns="">
             <p:sp>
               <p:nvSpPr>
                 <p:cNvPr id="36" name="TextBox 35">
@@ -5117,8 +5117,8 @@
             </p:sp>
           </mc:Fallback>
         </mc:AlternateContent>
-        <mc:AlternateContent xmlns:mc="http://schemas.openxmlformats.org/markup-compatibility/2006">
-          <mc:Choice xmlns:a14="http://schemas.microsoft.com/office/drawing/2010/main" Requires="a14">
+        <mc:AlternateContent xmlns:mc="http://schemas.openxmlformats.org/markup-compatibility/2006" xmlns:a14="http://schemas.microsoft.com/office/drawing/2010/main">
+          <mc:Choice Requires="a14">
             <p:sp>
               <p:nvSpPr>
                 <p:cNvPr id="37" name="TextBox 36">
@@ -5176,7 +5176,7 @@
               </p:txBody>
             </p:sp>
           </mc:Choice>
-          <mc:Fallback>
+          <mc:Fallback xmlns="">
             <p:sp>
               <p:nvSpPr>
                 <p:cNvPr id="37" name="TextBox 36">
@@ -5319,8 +5319,8 @@
             </a:p>
           </p:txBody>
         </p:sp>
-        <mc:AlternateContent xmlns:mc="http://schemas.openxmlformats.org/markup-compatibility/2006">
-          <mc:Choice xmlns:a14="http://schemas.microsoft.com/office/drawing/2010/main" Requires="a14">
+        <mc:AlternateContent xmlns:mc="http://schemas.openxmlformats.org/markup-compatibility/2006" xmlns:a14="http://schemas.microsoft.com/office/drawing/2010/main">
+          <mc:Choice Requires="a14">
             <p:sp>
               <p:nvSpPr>
                 <p:cNvPr id="40" name="TextBox 39">
@@ -5392,7 +5392,7 @@
               </p:txBody>
             </p:sp>
           </mc:Choice>
-          <mc:Fallback>
+          <mc:Fallback xmlns="">
             <p:sp>
               <p:nvSpPr>
                 <p:cNvPr id="40" name="TextBox 39">
@@ -5437,8 +5437,8 @@
             </p:sp>
           </mc:Fallback>
         </mc:AlternateContent>
-        <mc:AlternateContent xmlns:mc="http://schemas.openxmlformats.org/markup-compatibility/2006">
-          <mc:Choice xmlns:a14="http://schemas.microsoft.com/office/drawing/2010/main" Requires="a14">
+        <mc:AlternateContent xmlns:mc="http://schemas.openxmlformats.org/markup-compatibility/2006" xmlns:a14="http://schemas.microsoft.com/office/drawing/2010/main">
+          <mc:Choice Requires="a14">
             <p:sp>
               <p:nvSpPr>
                 <p:cNvPr id="41" name="TextBox 40">
@@ -5516,7 +5516,7 @@
               </p:txBody>
             </p:sp>
           </mc:Choice>
-          <mc:Fallback>
+          <mc:Fallback xmlns="">
             <p:sp>
               <p:nvSpPr>
                 <p:cNvPr id="41" name="TextBox 40">
